--- a/ppt/out/WLC2급_제04강_웰다잉문화와엔딩산업의확장.pptx
+++ b/ppt/out/WLC2급_제04강_웰다잉문화와엔딩산업의확장.pptx
@@ -160,7 +160,7 @@
   <p:extLst>
     <p:ext uri="{521415D9-36F7-43E2-AB2F-B90AF26B5E84}">
       <p14:sectionLst xmlns:p14="http://schemas.microsoft.com/office/powerpoint/2010/main">
-        <p14:section name="열기" id="{2d0a02f1-9ac0-38e7-f401-1537af1774b0}">
+        <p14:section name="열기" id="{58554c4c-0e06-fa79-73b2-5ed33343191d}">
           <p14:sldIdLst>
             <p14:sldId id="256"/>
             <p14:sldId id="257"/>
@@ -173,7 +173,7 @@
             <p14:sldId id="264"/>
           </p14:sldIdLst>
         </p14:section>
-        <p14:section name="1교시 엔딩산업의 지도" id="{dbc1690e-d15a-bde6-8e76-277e09762127}">
+        <p14:section name="1교시 엔딩산업의 지도" id="{12c5b659-b967-ad9f-5072-9e333bacb587}">
           <p14:sldIdLst>
             <p14:sldId id="265"/>
             <p14:sldId id="266"/>
@@ -187,7 +187,7 @@
             <p14:sldId id="274"/>
           </p14:sldIdLst>
         </p14:section>
-        <p14:section name="2교시 변화하는 장례와 새로운 상실" id="{beabb93c-2738-f332-e8d8-3489991a5654}">
+        <p14:section name="2교시 변화하는 장례와 새로운 상실" id="{632a579b-0fac-24f6-7002-4db9daf7f7ac}">
           <p14:sldIdLst>
             <p14:sldId id="275"/>
             <p14:sldId id="276"/>
@@ -206,7 +206,7 @@
             <p14:sldId id="289"/>
           </p14:sldIdLst>
         </p14:section>
-        <p14:section name="3교시 선택을 돕는 WLC" id="{5fd67a95-db8b-5cc8-35fb-6345bbeb6503}">
+        <p14:section name="3교시 선택을 돕는 WLC" id="{81c0477d-c83a-914b-1570-f293d3683f3a}">
           <p14:sldIdLst>
             <p14:sldId id="290"/>
             <p14:sldId id="291"/>
@@ -224,7 +224,7 @@
             <p14:sldId id="303"/>
           </p14:sldIdLst>
         </p14:section>
-        <p14:section name="정리와 예고" id="{0f3c1677-2b65-33ac-f1a2-f42ca0f4f91b}">
+        <p14:section name="정리와 예고" id="{4247337f-6e2f-5e49-30a1-fb133265fa3a}">
           <p14:sldIdLst>
             <p14:sldId id="304"/>
             <p14:sldId id="305"/>
@@ -7429,7 +7429,7 @@
         <p:spPr>
           <a:xfrm>
             <a:off x="548640" y="2560320"/>
-            <a:ext cx="9144000" cy="1097280"/>
+            <a:ext cx="10607040" cy="1097280"/>
           </a:xfrm>
           <a:prstGeom prst="rect">
             <a:avLst/>
@@ -53771,47 +53771,47 @@
 </file>
 
 <file path=ppt/theme/theme1.xml><?xml version="1.0" encoding="utf-8"?>
-<a:theme xmlns:a="http://schemas.openxmlformats.org/drawingml/2006/main" name="WLC Teal">
+<a:theme xmlns:a="http://schemas.openxmlformats.org/drawingml/2006/main" name="Office Theme">
   <a:themeElements>
-    <a:clrScheme name="WLC Teal">
+    <a:clrScheme name="Office">
       <a:dk1>
-        <a:srgbClr val="222222"/>
+        <a:sysClr val="windowText" lastClr="000000"/>
       </a:dk1>
       <a:lt1>
-        <a:srgbClr val="FFFFFF"/>
+        <a:sysClr val="window" lastClr="FFFFFF"/>
       </a:lt1>
       <a:dk2>
-        <a:srgbClr val="1F4E4A"/>
+        <a:srgbClr val="44546A"/>
       </a:dk2>
       <a:lt2>
-        <a:srgbClr val="EAF3F0"/>
+        <a:srgbClr val="E7E6E6"/>
       </a:lt2>
       <a:accent1>
-        <a:srgbClr val="2E7D6B"/>
+        <a:srgbClr val="4472C4"/>
       </a:accent1>
       <a:accent2>
-        <a:srgbClr val="D98E04"/>
+        <a:srgbClr val="ED7D31"/>
       </a:accent2>
       <a:accent3>
-        <a:srgbClr val="3A6EA5"/>
+        <a:srgbClr val="A5A5A5"/>
       </a:accent3>
       <a:accent4>
-        <a:srgbClr val="B5452F"/>
+        <a:srgbClr val="FFC000"/>
       </a:accent4>
       <a:accent5>
-        <a:srgbClr val="8FB9A8"/>
+        <a:srgbClr val="5B9BD5"/>
       </a:accent5>
       <a:accent6>
-        <a:srgbClr val="6B6B6B"/>
+        <a:srgbClr val="70AD47"/>
       </a:accent6>
       <a:hlink>
-        <a:srgbClr val="3A6EA5"/>
+        <a:srgbClr val="0563C1"/>
       </a:hlink>
       <a:folHlink>
-        <a:srgbClr val="1F4E4A"/>
+        <a:srgbClr val="954F72"/>
       </a:folHlink>
     </a:clrScheme>
-    <a:fontScheme name="WLC Teal">
+    <a:fontScheme name="Office">
       <a:majorFont>
         <a:latin typeface="Noto Serif KR Black"/>
         <a:ea typeface=""/>

--- a/ppt/out/WLC2급_제04강_웰다잉문화와엔딩산업의확장.pptx
+++ b/ppt/out/WLC2급_제04강_웰다잉문화와엔딩산업의확장.pptx
@@ -160,7 +160,7 @@
   <p:extLst>
     <p:ext uri="{521415D9-36F7-43E2-AB2F-B90AF26B5E84}">
       <p14:sectionLst xmlns:p14="http://schemas.microsoft.com/office/powerpoint/2010/main">
-        <p14:section name="열기" id="{58554c4c-0e06-fa79-73b2-5ed33343191d}">
+        <p14:section name="열기" id="{6f2f9e59-bf14-a78b-f619-40e94aee9ba9}">
           <p14:sldIdLst>
             <p14:sldId id="256"/>
             <p14:sldId id="257"/>
@@ -173,7 +173,7 @@
             <p14:sldId id="264"/>
           </p14:sldIdLst>
         </p14:section>
-        <p14:section name="1교시 엔딩산업의 지도" id="{12c5b659-b967-ad9f-5072-9e333bacb587}">
+        <p14:section name="1교시 엔딩산업의 지도" id="{951c3eb3-c945-9fa5-8183-d9ee498f2b5a}">
           <p14:sldIdLst>
             <p14:sldId id="265"/>
             <p14:sldId id="266"/>
@@ -187,7 +187,7 @@
             <p14:sldId id="274"/>
           </p14:sldIdLst>
         </p14:section>
-        <p14:section name="2교시 변화하는 장례와 새로운 상실" id="{632a579b-0fac-24f6-7002-4db9daf7f7ac}">
+        <p14:section name="2교시 변화하는 장례와 새로운 상실" id="{b711e2b3-320e-2716-b00b-88082c609944}">
           <p14:sldIdLst>
             <p14:sldId id="275"/>
             <p14:sldId id="276"/>
@@ -206,7 +206,7 @@
             <p14:sldId id="289"/>
           </p14:sldIdLst>
         </p14:section>
-        <p14:section name="3교시 선택을 돕는 WLC" id="{81c0477d-c83a-914b-1570-f293d3683f3a}">
+        <p14:section name="3교시 선택을 돕는 WLC" id="{fd526246-0528-9c83-67a2-d87235777686}">
           <p14:sldIdLst>
             <p14:sldId id="290"/>
             <p14:sldId id="291"/>
@@ -224,7 +224,7 @@
             <p14:sldId id="303"/>
           </p14:sldIdLst>
         </p14:section>
-        <p14:section name="정리와 예고" id="{4247337f-6e2f-5e49-30a1-fb133265fa3a}">
+        <p14:section name="정리와 예고" id="{fe727994-2a48-535e-28d4-31d95479630b}">
           <p14:sldIdLst>
             <p14:sldId id="304"/>
             <p14:sldId id="305"/>
@@ -53771,47 +53771,47 @@
 </file>
 
 <file path=ppt/theme/theme1.xml><?xml version="1.0" encoding="utf-8"?>
-<a:theme xmlns:a="http://schemas.openxmlformats.org/drawingml/2006/main" name="Office Theme">
+<a:theme xmlns:a="http://schemas.openxmlformats.org/drawingml/2006/main" name="WLC Teal">
   <a:themeElements>
-    <a:clrScheme name="Office">
+    <a:clrScheme name="WLC Teal">
       <a:dk1>
-        <a:sysClr val="windowText" lastClr="000000"/>
+        <a:srgbClr val="222222"/>
       </a:dk1>
       <a:lt1>
-        <a:sysClr val="window" lastClr="FFFFFF"/>
+        <a:srgbClr val="FFFFFF"/>
       </a:lt1>
       <a:dk2>
-        <a:srgbClr val="44546A"/>
+        <a:srgbClr val="1F4E4A"/>
       </a:dk2>
       <a:lt2>
-        <a:srgbClr val="E7E6E6"/>
+        <a:srgbClr val="EAF3F0"/>
       </a:lt2>
       <a:accent1>
-        <a:srgbClr val="4472C4"/>
+        <a:srgbClr val="2E7D6B"/>
       </a:accent1>
       <a:accent2>
-        <a:srgbClr val="ED7D31"/>
+        <a:srgbClr val="D98E04"/>
       </a:accent2>
       <a:accent3>
-        <a:srgbClr val="A5A5A5"/>
+        <a:srgbClr val="3A6EA5"/>
       </a:accent3>
       <a:accent4>
-        <a:srgbClr val="FFC000"/>
+        <a:srgbClr val="B5452F"/>
       </a:accent4>
       <a:accent5>
-        <a:srgbClr val="5B9BD5"/>
+        <a:srgbClr val="8FB9A8"/>
       </a:accent5>
       <a:accent6>
-        <a:srgbClr val="70AD47"/>
+        <a:srgbClr val="6B6B6B"/>
       </a:accent6>
       <a:hlink>
-        <a:srgbClr val="0563C1"/>
+        <a:srgbClr val="3A6EA5"/>
       </a:hlink>
       <a:folHlink>
-        <a:srgbClr val="954F72"/>
+        <a:srgbClr val="1F4E4A"/>
       </a:folHlink>
     </a:clrScheme>
-    <a:fontScheme name="Office">
+    <a:fontScheme name="WLC Teal">
       <a:majorFont>
         <a:latin typeface="Noto Serif KR Black"/>
         <a:ea typeface=""/>
